--- a/강의자료/판다스2_16-20차시.pptx
+++ b/강의자료/판다스2_16-20차시.pptx
@@ -5160,8 +5160,8 @@
         </p:nvSpPr>
         <p:spPr>
           <a:xfrm>
-            <a:off x="658368" y="3456432"/>
-            <a:ext cx="1280160" cy="621792"/>
+            <a:off x="658368" y="3438144"/>
+            <a:ext cx="1298448" cy="658368"/>
           </a:xfrm>
           <a:prstGeom prst="rect">
             <a:avLst/>
@@ -5174,10 +5174,13 @@
           <a:lstStyle/>
           <a:p>
             <a:pPr indent="0" marL="0">
-              <a:buNone/>
-            </a:pPr>
-            <a:r>
-              <a:rPr lang="en-US" sz="1200" b="1" dirty="0">
+              <a:lnSpc>
+                <a:spcPct val="105000"/>
+              </a:lnSpc>
+              <a:buNone/>
+            </a:pPr>
+            <a:r>
+              <a:rPr lang="en-US" sz="1100" b="1" dirty="0">
                 <a:solidFill>
                   <a:srgbClr val="FFFFFF"/>
                 </a:solidFill>
@@ -5187,14 +5190,17 @@
               </a:rPr>
               <a:t>df.isna()</a:t>
             </a:r>
-            <a:endParaRPr lang="en-US" sz="1200" dirty="0"/>
-          </a:p>
-          <a:p>
-            <a:pPr indent="0" marL="0">
-              <a:buNone/>
-            </a:pPr>
-            <a:r>
-              <a:rPr lang="en-US" sz="1200" b="1" dirty="0">
+            <a:endParaRPr lang="en-US" sz="1100" dirty="0"/>
+          </a:p>
+          <a:p>
+            <a:pPr indent="0" marL="0">
+              <a:lnSpc>
+                <a:spcPct val="105000"/>
+              </a:lnSpc>
+              <a:buNone/>
+            </a:pPr>
+            <a:r>
+              <a:rPr lang="en-US" sz="1100" b="1" dirty="0">
                 <a:solidFill>
                   <a:srgbClr val="FFFFFF"/>
                 </a:solidFill>
@@ -5204,7 +5210,7 @@
               </a:rPr>
               <a:t>df.notna()</a:t>
             </a:r>
-            <a:endParaRPr lang="en-US" sz="1200" dirty="0"/>
+            <a:endParaRPr lang="en-US" sz="1100" dirty="0"/>
           </a:p>
         </p:txBody>
       </p:sp>
@@ -5282,8 +5288,8 @@
         </p:nvSpPr>
         <p:spPr>
           <a:xfrm>
-            <a:off x="2267712" y="3456432"/>
-            <a:ext cx="1280160" cy="621792"/>
+            <a:off x="2267712" y="3438144"/>
+            <a:ext cx="1298448" cy="658368"/>
           </a:xfrm>
           <a:prstGeom prst="rect">
             <a:avLst/>
@@ -5296,10 +5302,13 @@
           <a:lstStyle/>
           <a:p>
             <a:pPr indent="0" marL="0">
-              <a:buNone/>
-            </a:pPr>
-            <a:r>
-              <a:rPr lang="en-US" sz="1200" b="1" dirty="0">
+              <a:lnSpc>
+                <a:spcPct val="105000"/>
+              </a:lnSpc>
+              <a:buNone/>
+            </a:pPr>
+            <a:r>
+              <a:rPr lang="en-US" sz="1071" b="1" dirty="0">
                 <a:solidFill>
                   <a:srgbClr val="FFFFFF"/>
                 </a:solidFill>
@@ -5309,14 +5318,17 @@
               </a:rPr>
               <a:t>df.dropna()</a:t>
             </a:r>
-            <a:endParaRPr lang="en-US" sz="1200" dirty="0"/>
-          </a:p>
-          <a:p>
-            <a:pPr indent="0" marL="0">
-              <a:buNone/>
-            </a:pPr>
-            <a:r>
-              <a:rPr lang="en-US" sz="1200" b="1" dirty="0">
+            <a:endParaRPr lang="en-US" sz="1071" dirty="0"/>
+          </a:p>
+          <a:p>
+            <a:pPr indent="0" marL="0">
+              <a:lnSpc>
+                <a:spcPct val="105000"/>
+              </a:lnSpc>
+              <a:buNone/>
+            </a:pPr>
+            <a:r>
+              <a:rPr lang="en-US" sz="1071" b="1" dirty="0">
                 <a:solidFill>
                   <a:srgbClr val="FFFFFF"/>
                 </a:solidFill>
@@ -5326,7 +5338,7 @@
               </a:rPr>
               <a:t>subset=['col']</a:t>
             </a:r>
-            <a:endParaRPr lang="en-US" sz="1200" dirty="0"/>
+            <a:endParaRPr lang="en-US" sz="1071" dirty="0"/>
           </a:p>
         </p:txBody>
       </p:sp>
@@ -5404,8 +5416,8 @@
         </p:nvSpPr>
         <p:spPr>
           <a:xfrm>
-            <a:off x="3877056" y="3456432"/>
-            <a:ext cx="1280160" cy="621792"/>
+            <a:off x="3877056" y="3438144"/>
+            <a:ext cx="1298448" cy="658368"/>
           </a:xfrm>
           <a:prstGeom prst="rect">
             <a:avLst/>
@@ -5418,10 +5430,13 @@
           <a:lstStyle/>
           <a:p>
             <a:pPr indent="0" marL="0">
-              <a:buNone/>
-            </a:pPr>
-            <a:r>
-              <a:rPr lang="en-US" sz="1200" b="1" dirty="0">
+              <a:lnSpc>
+                <a:spcPct val="105000"/>
+              </a:lnSpc>
+              <a:buNone/>
+            </a:pPr>
+            <a:r>
+              <a:rPr lang="en-US" sz="882" b="1" dirty="0">
                 <a:solidFill>
                   <a:srgbClr val="FFFFFF"/>
                 </a:solidFill>
@@ -5431,14 +5446,17 @@
               </a:rPr>
               <a:t>df.fillna()</a:t>
             </a:r>
-            <a:endParaRPr lang="en-US" sz="1200" dirty="0"/>
-          </a:p>
-          <a:p>
-            <a:pPr indent="0" marL="0">
-              <a:buNone/>
-            </a:pPr>
-            <a:r>
-              <a:rPr lang="en-US" sz="1200" b="1" dirty="0">
+            <a:endParaRPr lang="en-US" sz="882" dirty="0"/>
+          </a:p>
+          <a:p>
+            <a:pPr indent="0" marL="0">
+              <a:lnSpc>
+                <a:spcPct val="105000"/>
+              </a:lnSpc>
+              <a:buNone/>
+            </a:pPr>
+            <a:r>
+              <a:rPr lang="en-US" sz="882" b="1" dirty="0">
                 <a:solidFill>
                   <a:srgbClr val="FFFFFF"/>
                 </a:solidFill>
@@ -5448,7 +5466,7 @@
               </a:rPr>
               <a:t>mean() / median()</a:t>
             </a:r>
-            <a:endParaRPr lang="en-US" sz="1200" dirty="0"/>
+            <a:endParaRPr lang="en-US" sz="882" dirty="0"/>
           </a:p>
         </p:txBody>
       </p:sp>
@@ -5526,8 +5544,8 @@
         </p:nvSpPr>
         <p:spPr>
           <a:xfrm>
-            <a:off x="5486400" y="3456432"/>
-            <a:ext cx="1280160" cy="621792"/>
+            <a:off x="5486400" y="3438144"/>
+            <a:ext cx="1298448" cy="658368"/>
           </a:xfrm>
           <a:prstGeom prst="rect">
             <a:avLst/>
@@ -5540,10 +5558,13 @@
           <a:lstStyle/>
           <a:p>
             <a:pPr indent="0" marL="0">
-              <a:buNone/>
-            </a:pPr>
-            <a:r>
-              <a:rPr lang="en-US" sz="1200" b="1" dirty="0">
+              <a:lnSpc>
+                <a:spcPct val="105000"/>
+              </a:lnSpc>
+              <a:buNone/>
+            </a:pPr>
+            <a:r>
+              <a:rPr lang="en-US" sz="1000" b="1" dirty="0">
                 <a:solidFill>
                   <a:srgbClr val="FFFFFF"/>
                 </a:solidFill>
@@ -5553,14 +5574,17 @@
               </a:rPr>
               <a:t>df.drop(axis=1)</a:t>
             </a:r>
-            <a:endParaRPr lang="en-US" sz="1200" dirty="0"/>
-          </a:p>
-          <a:p>
-            <a:pPr indent="0" marL="0">
-              <a:buNone/>
-            </a:pPr>
-            <a:r>
-              <a:rPr lang="en-US" sz="1200" b="1" dirty="0">
+            <a:endParaRPr lang="en-US" sz="1000" dirty="0"/>
+          </a:p>
+          <a:p>
+            <a:pPr indent="0" marL="0">
+              <a:lnSpc>
+                <a:spcPct val="105000"/>
+              </a:lnSpc>
+              <a:buNone/>
+            </a:pPr>
+            <a:r>
+              <a:rPr lang="en-US" sz="1000" b="1" dirty="0">
                 <a:solidFill>
                   <a:srgbClr val="FFFFFF"/>
                 </a:solidFill>
@@ -5570,7 +5594,7 @@
               </a:rPr>
               <a:t>df.rename()</a:t>
             </a:r>
-            <a:endParaRPr lang="en-US" sz="1200" dirty="0"/>
+            <a:endParaRPr lang="en-US" sz="1000" dirty="0"/>
           </a:p>
         </p:txBody>
       </p:sp>
@@ -5648,8 +5672,8 @@
         </p:nvSpPr>
         <p:spPr>
           <a:xfrm>
-            <a:off x="7095744" y="3456432"/>
-            <a:ext cx="1280160" cy="621792"/>
+            <a:off x="7095744" y="3438144"/>
+            <a:ext cx="1298448" cy="658368"/>
           </a:xfrm>
           <a:prstGeom prst="rect">
             <a:avLst/>
@@ -5662,10 +5686,13 @@
           <a:lstStyle/>
           <a:p>
             <a:pPr indent="0" marL="0">
-              <a:buNone/>
-            </a:pPr>
-            <a:r>
-              <a:rPr lang="en-US" sz="1200" b="1" dirty="0">
+              <a:lnSpc>
+                <a:spcPct val="105000"/>
+              </a:lnSpc>
+              <a:buNone/>
+            </a:pPr>
+            <a:r>
+              <a:rPr lang="en-US" sz="938" b="1" dirty="0">
                 <a:solidFill>
                   <a:srgbClr val="FFFFFF"/>
                 </a:solidFill>
@@ -5675,14 +5702,17 @@
               </a:rPr>
               <a:t>df.astype()</a:t>
             </a:r>
-            <a:endParaRPr lang="en-US" sz="1200" dirty="0"/>
-          </a:p>
-          <a:p>
-            <a:pPr indent="0" marL="0">
-              <a:buNone/>
-            </a:pPr>
-            <a:r>
-              <a:rPr lang="en-US" sz="1200" b="1" dirty="0">
+            <a:endParaRPr lang="en-US" sz="938" dirty="0"/>
+          </a:p>
+          <a:p>
+            <a:pPr indent="0" marL="0">
+              <a:lnSpc>
+                <a:spcPct val="105000"/>
+              </a:lnSpc>
+              <a:buNone/>
+            </a:pPr>
+            <a:r>
+              <a:rPr lang="en-US" sz="938" b="1" dirty="0">
                 <a:solidFill>
                   <a:srgbClr val="FFFFFF"/>
                 </a:solidFill>
@@ -5692,7 +5722,7 @@
               </a:rPr>
               <a:t>pd.to_datetime()</a:t>
             </a:r>
-            <a:endParaRPr lang="en-US" sz="1200" dirty="0"/>
+            <a:endParaRPr lang="en-US" sz="938" dirty="0"/>
           </a:p>
         </p:txBody>
       </p:sp>
